--- a/assets/pptx/catalog-399.pptx
+++ b/assets/pptx/catalog-399.pptx
@@ -3313,7 +3313,7 @@
                 <a:ea typeface="Ebrima"/>
                 <a:cs typeface="Ebrima"/>
               </a:rPr>
-              <a:t>የምህረት ዓይኑ ዛሬም ያየኛል አልሰለቸኝም ይፈልገኛል (2x)</a:t>
+              <a:t>የምህረት ዓይኑ ዛሬም ያየኛል አልሰለቸኝም ይፈልገኛል 2x</a:t>
             </a:r>
           </a:p>
           <a:p>
@@ -3421,7 +3421,7 @@
                 <a:ea typeface="Ebrima"/>
                 <a:cs typeface="Ebrima"/>
               </a:rPr>
-              <a:t>ያለ ምክንያት ወደህ በምክንያት አትጠላም ለምህረትህ ስፍር መለኪያ የለውም የአንተ ፍቅር መነሺያው ከራስህ የመውደድ ልብ የማያልቅብህ (2x) የእኔ ጌታ</a:t>
+              <a:t>ያለ ምክንያት ወደህ በምክንያት አትጠላም ለምህረትህ ስፍር መለኪያ የለውም የአንተ ፍቅር መነሺያው ከራስህ የመውደድ ልብ የማያልቅብህ 2x የእኔ ጌታ</a:t>
             </a:r>
           </a:p>
           <a:p>
